--- a/outsystems/niveau-3/deel-29/slidedeck.pptx
+++ b/outsystems/niveau-3/deel-29/slidedeck.pptx
@@ -3319,8 +3319,8 @@
         </p:nvSpPr>
         <p:spPr>
           <a:xfrm>
-            <a:off x="640080" y="548640"/>
-            <a:ext cx="10881360" cy="914400"/>
+            <a:off x="640080" y="457200"/>
+            <a:ext cx="10881360" cy="822960"/>
           </a:xfrm>
           <a:prstGeom prst="rect">
             <a:avLst/>
@@ -3585,8 +3585,8 @@
         </p:nvSpPr>
         <p:spPr>
           <a:xfrm>
-            <a:off x="640080" y="548640"/>
-            <a:ext cx="10881360" cy="914400"/>
+            <a:off x="640080" y="457200"/>
+            <a:ext cx="10881360" cy="822960"/>
           </a:xfrm>
           <a:prstGeom prst="rect">
             <a:avLst/>
@@ -3766,8 +3766,8 @@
         </p:nvSpPr>
         <p:spPr>
           <a:xfrm>
-            <a:off x="640080" y="548640"/>
-            <a:ext cx="10881360" cy="914400"/>
+            <a:off x="640080" y="457200"/>
+            <a:ext cx="10881360" cy="822960"/>
           </a:xfrm>
           <a:prstGeom prst="rect">
             <a:avLst/>
@@ -4067,8 +4067,8 @@
         </p:nvSpPr>
         <p:spPr>
           <a:xfrm>
-            <a:off x="640080" y="457200"/>
-            <a:ext cx="10881360" cy="731520"/>
+            <a:off x="640080" y="365760"/>
+            <a:ext cx="10881360" cy="640080"/>
           </a:xfrm>
           <a:prstGeom prst="rect">
             <a:avLst/>
@@ -4083,7 +4083,7 @@
           <a:p>
             <a:pPr algn="l"/>
             <a:r>
-              <a:rPr sz="2600" b="1">
+              <a:rPr sz="2400" b="1">
                 <a:solidFill>
                   <a:srgbClr val="14213D"/>
                 </a:solidFill>
@@ -4103,8 +4103,8 @@
           <p:nvPr/>
         </p:nvGraphicFramePr>
         <p:xfrm>
-          <a:off x="640080" y="1371600"/>
-          <a:ext cx="10881360" cy="2194560"/>
+          <a:off x="640080" y="1097280"/>
+          <a:ext cx="10881360" cy="1828800"/>
         </p:xfrm>
         <a:graphic>
           <a:graphicData uri="http://schemas.openxmlformats.org/drawingml/2006/table">
@@ -4116,14 +4116,14 @@
                 <a:gridCol w="5440680"/>
                 <a:gridCol w="5440680"/>
               </a:tblGrid>
-              <a:tr h="548640">
+              <a:tr h="457200">
                 <a:tc>
                   <a:txBody>
                     <a:bodyPr/>
                     <a:lstStyle/>
                     <a:p>
                       <a:r>
-                        <a:rPr sz="1600" b="1"/>
+                        <a:rPr sz="1400" b="1"/>
                         <a:t>Situatie</a:t>
                       </a:r>
                     </a:p>
@@ -4136,7 +4136,7 @@
                     <a:lstStyle/>
                     <a:p>
                       <a:r>
-                        <a:rPr sz="1600" b="1"/>
+                        <a:rPr sz="1400" b="1"/>
                         <a:t>Reactie</a:t>
                       </a:r>
                     </a:p>
@@ -4144,14 +4144,14 @@
                   <a:tcPr/>
                 </a:tc>
               </a:tr>
-              <a:tr h="548640">
+              <a:tr h="457200">
                 <a:tc>
                   <a:txBody>
                     <a:bodyPr/>
                     <a:lstStyle/>
                     <a:p>
                       <a:r>
-                        <a:rPr sz="1600"/>
+                        <a:rPr sz="1400"/>
                         <a:t>Agressievere migratietijdlijn dan geadviseerd</a:t>
                       </a:r>
                     </a:p>
@@ -4164,7 +4164,7 @@
                     <a:lstStyle/>
                     <a:p>
                       <a:r>
-                        <a:rPr sz="1600"/>
+                        <a:rPr sz="1400"/>
                         <a:t>Uitvoeren + risicologboek</a:t>
                       </a:r>
                     </a:p>
@@ -4172,14 +4172,14 @@
                   <a:tcPr/>
                 </a:tc>
               </a:tr>
-              <a:tr h="548640">
+              <a:tr h="457200">
                 <a:tc>
                   <a:txBody>
                     <a:bodyPr/>
                     <a:lstStyle/>
                     <a:p>
                       <a:r>
-                        <a:rPr sz="1600"/>
+                        <a:rPr sz="1400"/>
                         <a:t>AuditLog tijdelijk uitschakelen</a:t>
                       </a:r>
                     </a:p>
@@ -4192,7 +4192,7 @@
                     <a:lstStyle/>
                     <a:p>
                       <a:r>
-                        <a:rPr sz="1600"/>
+                        <a:rPr sz="1400"/>
                         <a:t>Harde grens</a:t>
                       </a:r>
                     </a:p>
@@ -4200,14 +4200,14 @@
                   <a:tcPr/>
                 </a:tc>
               </a:tr>
-              <a:tr h="548640">
+              <a:tr h="457200">
                 <a:tc>
                   <a:txBody>
                     <a:bodyPr/>
                     <a:lstStyle/>
                     <a:p>
                       <a:r>
-                        <a:rPr sz="1600"/>
+                        <a:rPr sz="1400"/>
                         <a:t>AI-goedkeuring zonder mens</a:t>
                       </a:r>
                     </a:p>
@@ -4220,7 +4220,7 @@
                     <a:lstStyle/>
                     <a:p>
                       <a:r>
-                        <a:rPr sz="1600"/>
+                        <a:rPr sz="1400"/>
                         <a:t>Harde grens</a:t>
                       </a:r>
                     </a:p>
